--- a/Seti/Doklads/Типы компьютерных сетей LAN, WAN, MAN, PAN.pptx
+++ b/Seti/Doklads/Типы компьютерных сетей LAN, WAN, MAN, PAN.pptx
@@ -109,6 +109,11 @@
       </a:defRPr>
     </a:lvl9pPr>
   </p:defaultTextStyle>
+  <p:extLst>
+    <p:ext uri="{EFAFB233-063F-42B5-8137-9DF3F51BA10A}">
+      <p15:sldGuideLst xmlns:p15="http://schemas.microsoft.com/office/powerpoint/2012/main"/>
+    </p:ext>
+  </p:extLst>
 </p:presentation>
 </file>
 
@@ -3467,7 +3472,7 @@
                 <a16:creationId xmlns:a16="http://schemas.microsoft.com/office/drawing/2014/main" id="{0EECA69B-4C2A-7F31-8019-E90DB3BD49CB}"/>
               </a:ext>
               <a:ext uri="{C183D7F6-B498-43B3-948B-1728B52AA6E4}">
-                <adec:decorative xmlns:adec="http://schemas.microsoft.com/office/drawing/2017/decorative" val="1"/>
+                <adec:decorative xmlns:adec="http://schemas.microsoft.com/office/drawing/2017/decorative" xmlns="" val="1"/>
               </a:ext>
             </a:extLst>
           </p:cNvPr>
@@ -3606,7 +3611,7 @@
                 <a16:creationId xmlns:a16="http://schemas.microsoft.com/office/drawing/2014/main" id="{857DEAC1-B3AA-6569-0A44-A191DF2F3C67}"/>
               </a:ext>
               <a:ext uri="{C183D7F6-B498-43B3-948B-1728B52AA6E4}">
-                <adec:decorative xmlns:adec="http://schemas.microsoft.com/office/drawing/2017/decorative" val="1"/>
+                <adec:decorative xmlns:adec="http://schemas.microsoft.com/office/drawing/2017/decorative" xmlns="" val="1"/>
               </a:ext>
             </a:extLst>
           </p:cNvPr>
@@ -3711,7 +3716,7 @@
         <p:spPr>
           <a:xfrm>
             <a:off x="320040" y="5715000"/>
-            <a:ext cx="8027544" cy="960120"/>
+            <a:ext cx="11251276" cy="960120"/>
           </a:xfrm>
           <a:ln>
             <a:noFill/>
@@ -3729,7 +3734,7 @@
               </a:lnSpc>
             </a:pPr>
             <a:r>
-              <a:rPr lang="ru-RU" sz="3100"/>
+              <a:rPr lang="ru-RU" sz="3100" dirty="0"/>
               <a:t>Типы компьютерных сетей (LAN, WAN, MAN, PAN)</a:t>
             </a:r>
           </a:p>
@@ -3900,8 +3905,8 @@
         </p:nvSpPr>
         <p:spPr>
           <a:xfrm>
-            <a:off x="750367" y="41564"/>
-            <a:ext cx="10691265" cy="1307592"/>
+            <a:off x="290396" y="41564"/>
+            <a:ext cx="12311698" cy="976573"/>
           </a:xfrm>
         </p:spPr>
         <p:txBody>
@@ -4082,6 +4087,10 @@
               <a:rPr lang="en-US" dirty="0"/>
               <a:t> (MAN — Metropolitan Area Network)</a:t>
             </a:r>
+            <a:r>
+              <a:rPr lang="ru-RU" dirty="0"/>
+              <a:t/>
+            </a:r>
             <a:br>
               <a:rPr lang="ru-RU" dirty="0"/>
             </a:br>
@@ -4229,8 +4238,8 @@
         </p:nvSpPr>
         <p:spPr>
           <a:xfrm>
-            <a:off x="700634" y="59376"/>
-            <a:ext cx="10691265" cy="1307592"/>
+            <a:off x="227894" y="59376"/>
+            <a:ext cx="11992901" cy="1307592"/>
           </a:xfrm>
         </p:spPr>
         <p:txBody>
@@ -4246,6 +4255,10 @@
             <a:r>
               <a:rPr lang="en-US" dirty="0"/>
               <a:t> (WAN — Wide Area Network)</a:t>
+            </a:r>
+            <a:r>
+              <a:rPr lang="ru-RU" dirty="0"/>
+              <a:t/>
             </a:r>
             <a:br>
               <a:rPr lang="ru-RU" dirty="0"/>
@@ -4283,7 +4296,7 @@
         </p:blipFill>
         <p:spPr bwMode="auto">
           <a:xfrm>
-            <a:off x="236207" y="1021278"/>
+            <a:off x="227894" y="1179220"/>
             <a:ext cx="6506317" cy="4582212"/>
           </a:xfrm>
           <a:prstGeom prst="rect">
@@ -6427,7 +6440,7 @@
           <p:nvPr/>
         </p:nvPicPr>
         <p:blipFill rotWithShape="1">
-          <a:blip r:embed="rId4">
+          <a:blip r:embed="rId4" cstate="hqprint">
             <a:extLst>
               <a:ext uri="{28A0092B-C50C-407E-A947-70E740481C1C}">
                 <a14:useLocalDpi xmlns:a14="http://schemas.microsoft.com/office/drawing/2010/main" val="0"/>
